--- a/assets/pptx/catalog-613.pptx
+++ b/assets/pptx/catalog-613.pptx
@@ -3248,7 +3248,7 @@
                 <a:ea typeface="Ebrima"/>
                 <a:cs typeface="Ebrima"/>
               </a:rPr>
-              <a:t>- ተናግሬም አልጨርሰው ጌታ ለእኔ ያደረገው (2x)</a:t>
+              <a:t>- ተናግሬም አልጨርሰው ጌታ ለእኔ ያደረገው 2x</a:t>
             </a:r>
           </a:p>
           <a:p>
@@ -3266,7 +3266,7 @@
                 <a:ea typeface="Ebrima"/>
                 <a:cs typeface="Ebrima"/>
               </a:rPr>
-              <a:t>ልነሳና እስኪ ልቀኝ ለእርሱ ሚሆን ቋንቋ ቢገኝ (2x)</a:t>
+              <a:t>ልነሳና እስኪ ልቀኝ ለእርሱ ሚሆን ቋንቋ ቢገኝ 2x</a:t>
             </a:r>
           </a:p>
         </p:txBody>
@@ -3387,7 +3387,7 @@
                 <a:ea typeface="Ebrima"/>
                 <a:cs typeface="Ebrima"/>
               </a:rPr>
-              <a:t>መውደድህ (2x)</a:t>
+              <a:t>መውደድህ 2x</a:t>
             </a:r>
           </a:p>
         </p:txBody>
@@ -3508,7 +3508,7 @@
                 <a:ea typeface="Ebrima"/>
                 <a:cs typeface="Ebrima"/>
               </a:rPr>
-              <a:t>ከአእላፋት ይልቅ እርሱ/ጌታ ይበልጣል (2x)</a:t>
+              <a:t>ከአእላፋት ይልቅ እርሱ/ጌታ ይበልጣል 2x</a:t>
             </a:r>
           </a:p>
         </p:txBody>
@@ -3575,7 +3575,7 @@
                 <a:ea typeface="Ebrima"/>
                 <a:cs typeface="Ebrima"/>
               </a:rPr>
-              <a:t>- ተናግሬም አልጨርሰው ጌታ ለእኔ ያደረገው (2x)</a:t>
+              <a:t>- ተናግሬም አልጨርሰው ጌታ ለእኔ ያደረገው 2x</a:t>
             </a:r>
           </a:p>
           <a:p>
@@ -3593,7 +3593,7 @@
                 <a:ea typeface="Ebrima"/>
                 <a:cs typeface="Ebrima"/>
               </a:rPr>
-              <a:t>ልነሳና እስኪ ልቀኝ ለእርሱ ሚሆን ቋንቋ ቢገኝ (2x)</a:t>
+              <a:t>ልነሳና እስኪ ልቀኝ ለእርሱ ሚሆን ቋንቋ ቢገኝ 2x</a:t>
             </a:r>
           </a:p>
         </p:txBody>
@@ -3714,7 +3714,7 @@
                 <a:ea typeface="Ebrima"/>
                 <a:cs typeface="Ebrima"/>
               </a:rPr>
-              <a:t>መውደድህ (2x)</a:t>
+              <a:t>መውደድህ 2x</a:t>
             </a:r>
           </a:p>
         </p:txBody>
@@ -3835,7 +3835,7 @@
                 <a:ea typeface="Ebrima"/>
                 <a:cs typeface="Ebrima"/>
               </a:rPr>
-              <a:t>ውዱ የእኛ ጌታ የእኛ መድሃኒት (2x)</a:t>
+              <a:t>ውዱ የእኛ ጌታ የእኛ መድሃኒት 2x</a:t>
             </a:r>
           </a:p>
         </p:txBody>
@@ -3902,7 +3902,7 @@
                 <a:ea typeface="Ebrima"/>
                 <a:cs typeface="Ebrima"/>
               </a:rPr>
-              <a:t>- ተናግሬም አልጨርሰው ጌታ ለእኔ ያደረገው (2x)</a:t>
+              <a:t>- ተናግሬም አልጨርሰው ጌታ ለእኔ ያደረገው 2x</a:t>
             </a:r>
           </a:p>
           <a:p>
@@ -3920,7 +3920,7 @@
                 <a:ea typeface="Ebrima"/>
                 <a:cs typeface="Ebrima"/>
               </a:rPr>
-              <a:t>ልነሳና እስኪ ልቀኝ ለእርሱ ሚሆን ቋንቋ ቢገኝ (2x)</a:t>
+              <a:t>ልነሳና እስኪ ልቀኝ ለእርሱ ሚሆን ቋንቋ ቢገኝ 2x</a:t>
             </a:r>
           </a:p>
         </p:txBody>
@@ -4041,7 +4041,7 @@
                 <a:ea typeface="Ebrima"/>
                 <a:cs typeface="Ebrima"/>
               </a:rPr>
-              <a:t>መውደድህ (2x)</a:t>
+              <a:t>መውደድህ 2x</a:t>
             </a:r>
           </a:p>
         </p:txBody>
